--- a/assets/pptx/catalog-237.pptx
+++ b/assets/pptx/catalog-237.pptx
@@ -3319,7 +3319,7 @@
                 <a:ea typeface="Ebrima"/>
                 <a:cs typeface="Ebrima"/>
               </a:rPr>
-              <a:t>አንተ ከሁሉ በላይ ነህ በላይ ነህ (2x)</a:t>
+              <a:t>አንተ ከሁሉ በላይ ነህ በላይ ነህ 2x</a:t>
             </a:r>
           </a:p>
         </p:txBody>
@@ -3615,7 +3615,7 @@
                 <a:ea typeface="Ebrima"/>
                 <a:cs typeface="Ebrima"/>
               </a:rPr>
-              <a:t>አንተ ከሁሉ በላይ ነህ በላይ ነህ (2x)</a:t>
+              <a:t>አንተ ከሁሉ በላይ ነህ በላይ ነህ 2x</a:t>
             </a:r>
           </a:p>
         </p:txBody>
@@ -3911,7 +3911,7 @@
                 <a:ea typeface="Ebrima"/>
                 <a:cs typeface="Ebrima"/>
               </a:rPr>
-              <a:t>አንተ ከሁሉ በላይ ነህ በላይ ነህ (2x)</a:t>
+              <a:t>አንተ ከሁሉ በላይ ነህ በላይ ነህ 2x</a:t>
             </a:r>
           </a:p>
         </p:txBody>
@@ -4261,7 +4261,7 @@
                 <a:ea typeface="Ebrima"/>
                 <a:cs typeface="Ebrima"/>
               </a:rPr>
-              <a:t>አንተ ከሁሉ በላይ ነህ በላይ ነህ (2x)</a:t>
+              <a:t>አንተ ከሁሉ በላይ ነህ በላይ ነህ 2x</a:t>
             </a:r>
           </a:p>
         </p:txBody>
